--- a/Fase4/03_results/FaseB/ComparacionPID_vs_RL_F4B_Agente1900.pptx
+++ b/Fase4/03_results/FaseB/ComparacionPID_vs_RL_F4B_Agente1900.pptx
@@ -104,6 +104,11 @@
       </a:defRPr>
     </a:lvl9pPr>
   </p:defaultTextStyle>
+  <p:extLst>
+    <p:ext uri="{EFAFB233-063F-42B5-8137-9DF3F51BA10A}">
+      <p15:sldGuideLst xmlns:p15="http://schemas.microsoft.com/office/powerpoint/2012/main"/>
+    </p:ext>
+  </p:extLst>
 </p:presentation>
 </file>
 
@@ -256,7 +261,7 @@
           <a:p>
             <a:fld id="{FBF9B27C-1159-964B-9583-9033F2404727}" type="datetimeFigureOut">
               <a:rPr lang="es-ES_tradnl" smtClean="0"/>
-              <a:t>12/4/26</a:t>
+              <a:t>13/4/26</a:t>
             </a:fld>
             <a:endParaRPr lang="es-ES_tradnl"/>
           </a:p>
@@ -456,7 +461,7 @@
           <a:p>
             <a:fld id="{FBF9B27C-1159-964B-9583-9033F2404727}" type="datetimeFigureOut">
               <a:rPr lang="es-ES_tradnl" smtClean="0"/>
-              <a:t>12/4/26</a:t>
+              <a:t>13/4/26</a:t>
             </a:fld>
             <a:endParaRPr lang="es-ES_tradnl"/>
           </a:p>
@@ -666,7 +671,7 @@
           <a:p>
             <a:fld id="{FBF9B27C-1159-964B-9583-9033F2404727}" type="datetimeFigureOut">
               <a:rPr lang="es-ES_tradnl" smtClean="0"/>
-              <a:t>12/4/26</a:t>
+              <a:t>13/4/26</a:t>
             </a:fld>
             <a:endParaRPr lang="es-ES_tradnl"/>
           </a:p>
@@ -1278,7 +1283,7 @@
           <a:p>
             <a:fld id="{FBF9B27C-1159-964B-9583-9033F2404727}" type="datetimeFigureOut">
               <a:rPr lang="es-ES_tradnl" smtClean="0"/>
-              <a:t>12/4/26</a:t>
+              <a:t>13/4/26</a:t>
             </a:fld>
             <a:endParaRPr lang="es-ES_tradnl"/>
           </a:p>
@@ -1554,7 +1559,7 @@
           <a:p>
             <a:fld id="{FBF9B27C-1159-964B-9583-9033F2404727}" type="datetimeFigureOut">
               <a:rPr lang="es-ES_tradnl" smtClean="0"/>
-              <a:t>12/4/26</a:t>
+              <a:t>13/4/26</a:t>
             </a:fld>
             <a:endParaRPr lang="es-ES_tradnl"/>
           </a:p>
@@ -1822,7 +1827,7 @@
           <a:p>
             <a:fld id="{FBF9B27C-1159-964B-9583-9033F2404727}" type="datetimeFigureOut">
               <a:rPr lang="es-ES_tradnl" smtClean="0"/>
-              <a:t>12/4/26</a:t>
+              <a:t>13/4/26</a:t>
             </a:fld>
             <a:endParaRPr lang="es-ES_tradnl"/>
           </a:p>
@@ -2237,7 +2242,7 @@
           <a:p>
             <a:fld id="{FBF9B27C-1159-964B-9583-9033F2404727}" type="datetimeFigureOut">
               <a:rPr lang="es-ES_tradnl" smtClean="0"/>
-              <a:t>12/4/26</a:t>
+              <a:t>13/4/26</a:t>
             </a:fld>
             <a:endParaRPr lang="es-ES_tradnl"/>
           </a:p>
@@ -2379,7 +2384,7 @@
           <a:p>
             <a:fld id="{FBF9B27C-1159-964B-9583-9033F2404727}" type="datetimeFigureOut">
               <a:rPr lang="es-ES_tradnl" smtClean="0"/>
-              <a:t>12/4/26</a:t>
+              <a:t>13/4/26</a:t>
             </a:fld>
             <a:endParaRPr lang="es-ES_tradnl"/>
           </a:p>
@@ -2492,7 +2497,7 @@
           <a:p>
             <a:fld id="{FBF9B27C-1159-964B-9583-9033F2404727}" type="datetimeFigureOut">
               <a:rPr lang="es-ES_tradnl" smtClean="0"/>
-              <a:t>12/4/26</a:t>
+              <a:t>13/4/26</a:t>
             </a:fld>
             <a:endParaRPr lang="es-ES_tradnl"/>
           </a:p>
@@ -2805,7 +2810,7 @@
           <a:p>
             <a:fld id="{FBF9B27C-1159-964B-9583-9033F2404727}" type="datetimeFigureOut">
               <a:rPr lang="es-ES_tradnl" smtClean="0"/>
-              <a:t>12/4/26</a:t>
+              <a:t>13/4/26</a:t>
             </a:fld>
             <a:endParaRPr lang="es-ES_tradnl"/>
           </a:p>
@@ -3094,7 +3099,7 @@
           <a:p>
             <a:fld id="{FBF9B27C-1159-964B-9583-9033F2404727}" type="datetimeFigureOut">
               <a:rPr lang="es-ES_tradnl" smtClean="0"/>
-              <a:t>12/4/26</a:t>
+              <a:t>13/4/26</a:t>
             </a:fld>
             <a:endParaRPr lang="es-ES_tradnl"/>
           </a:p>
@@ -3337,7 +3342,7 @@
           <a:p>
             <a:fld id="{FBF9B27C-1159-964B-9583-9033F2404727}" type="datetimeFigureOut">
               <a:rPr lang="es-ES_tradnl" smtClean="0"/>
-              <a:t>12/4/26</a:t>
+              <a:t>13/4/26</a:t>
             </a:fld>
             <a:endParaRPr lang="es-ES_tradnl"/>
           </a:p>
@@ -3824,42 +3829,42 @@
           </a:bodyPr>
           <a:lstStyle/>
           <a:p>
-            <a:pPr marL="171450" indent="-171450">
+            <a:pPr marL="285750" indent="-285750">
               <a:buFont typeface="Symbol" pitchFamily="2" charset="2"/>
               <a:buChar char="-"/>
             </a:pPr>
             <a:r>
-              <a:rPr lang="es-ES_tradnl" sz="1400" noProof="1">
+              <a:rPr lang="es-ES_tradnl" sz="1400" dirty="0">
                 <a:latin typeface="Times New Roman" panose="02020603050405020304" pitchFamily="18" charset="0"/>
                 <a:cs typeface="Times New Roman" panose="02020603050405020304" pitchFamily="18" charset="0"/>
               </a:rPr>
-              <a:t>El controlador RL alcanza desempeño comparable al PID en plataforma plana (RMSE ≈31° en ambos casos).</a:t>
-            </a:r>
-          </a:p>
-          <a:p>
-            <a:pPr marL="171450" indent="-171450">
+              <a:t>En plataforma plana, el PID presenta menor error (RMSE ≈31.35°) frente al RL (≈36.70°), mostrando mejor desempeño en condiciones nominales.</a:t>
+            </a:r>
+          </a:p>
+          <a:p>
+            <a:pPr marL="285750" indent="-285750">
               <a:buFont typeface="Symbol" pitchFamily="2" charset="2"/>
               <a:buChar char="-"/>
             </a:pPr>
             <a:r>
-              <a:rPr lang="es-ES_tradnl" sz="1400" noProof="1">
+              <a:rPr lang="es-ES_tradnl" sz="1400" dirty="0">
                 <a:latin typeface="Times New Roman" panose="02020603050405020304" pitchFamily="18" charset="0"/>
                 <a:cs typeface="Times New Roman" panose="02020603050405020304" pitchFamily="18" charset="0"/>
               </a:rPr>
-              <a:t>Bajo inclinación, el RL reduce el error frente al PID (≈36.25° vs ≈40.55°, −10.6%), evidenciando mejor adaptación a perturbaciones gravitacionales.</a:t>
-            </a:r>
-          </a:p>
-          <a:p>
-            <a:pPr marL="171450" indent="-171450">
+              <a:t>En plataforma inclinada, el RL reduce el error respecto al PID (≈36.25° vs ≈40.55°, −10.6%), evidenciando mayor robustez ante perturbaciones.</a:t>
+            </a:r>
+          </a:p>
+          <a:p>
+            <a:pPr marL="285750" indent="-285750">
               <a:buFont typeface="Symbol" pitchFamily="2" charset="2"/>
               <a:buChar char="-"/>
             </a:pPr>
             <a:r>
-              <a:rPr lang="es-ES_tradnl" sz="1400" noProof="1">
+              <a:rPr lang="es-ES_tradnl" sz="1400" dirty="0">
                 <a:latin typeface="Times New Roman" panose="02020603050405020304" pitchFamily="18" charset="0"/>
                 <a:cs typeface="Times New Roman" panose="02020603050405020304" pitchFamily="18" charset="0"/>
               </a:rPr>
-              <a:t>El PID presenta una respuesta más suave, pero el RL muestra mayor robustez y capacidad de generalización en condiciones no nominales.</a:t>
+              <a:t>El RL sacrifica precisión en condiciones nominales a cambio de una mejor capacidad de adaptación y generalización.</a:t>
             </a:r>
           </a:p>
         </p:txBody>
